--- a/examples/professional_demo/Financials_IMPROVED_AI_PRO.pptx
+++ b/examples/professional_demo/Financials_IMPROVED_AI_PRO.pptx
@@ -616,6 +616,7 @@
 
 <file path=ppt/charts/chart3.xml><?xml version="1.0" encoding="utf-8"?>
 <c:chartSpace xmlns:c="http://schemas.openxmlformats.org/drawingml/2006/chart" xmlns:a="http://schemas.openxmlformats.org/drawingml/2006/main" xmlns:r="http://schemas.openxmlformats.org/officeDocument/2006/relationships">
+  <c:date1904 val="0"/>
   <c:chart>
     <c:title>
       <c:tx>
@@ -627,7 +628,7 @@
               <a:defRPr sz="1600" b="1"/>
             </a:pPr>
             <a:r>
-              <a:t>Category Distribution</a:t>
+              <a:t>Distribution by Sector</a:t>
             </a:r>
           </a:p>
         </c:rich>
@@ -637,8 +638,9 @@
     </c:title>
     <c:autoTitleDeleted val="0"/>
     <c:plotArea>
-      <c:pieChart>
-        <c:varyColors val="1"/>
+      <c:barChart>
+        <c:barDir val="bar"/>
+        <c:grouping val="clustered"/>
         <c:ser>
           <c:idx val="0"/>
           <c:order val="0"/>
@@ -661,12 +663,67 @@
               </a:solidFill>
             </c:spPr>
           </c:dPt>
+          <c:dPt>
+            <c:idx val="1"/>
+            <c:spPr>
+              <a:solidFill>
+                <a:srgbClr val="2E7D32"/>
+              </a:solidFill>
+            </c:spPr>
+          </c:dPt>
+          <c:dPt>
+            <c:idx val="2"/>
+            <c:spPr>
+              <a:solidFill>
+                <a:srgbClr val="FFC107"/>
+              </a:solidFill>
+            </c:spPr>
+          </c:dPt>
+          <c:dPt>
+            <c:idx val="3"/>
+            <c:spPr>
+              <a:solidFill>
+                <a:srgbClr val="D32F2F"/>
+              </a:solidFill>
+            </c:spPr>
+          </c:dPt>
+          <c:dPt>
+            <c:idx val="4"/>
+            <c:spPr>
+              <a:solidFill>
+                <a:srgbClr val="9C27B0"/>
+              </a:solidFill>
+            </c:spPr>
+          </c:dPt>
+          <c:dPt>
+            <c:idx val="5"/>
+            <c:spPr>
+              <a:solidFill>
+                <a:srgbClr val="FF9800"/>
+              </a:solidFill>
+            </c:spPr>
+          </c:dPt>
           <c:cat>
             <c:strRef>
-              <c:f>Sheet1!$A$2:$A$2</c:f>
+              <c:f>Sheet1!$A$2:$A$7</c:f>
               <c:strCache>
-                <c:ptCount val="1"/>
+                <c:ptCount val="6"/>
                 <c:pt idx="0">
+                  <c:v>Consumer Goods</c:v>
+                </c:pt>
+                <c:pt idx="1">
+                  <c:v>Consumer Goods</c:v>
+                </c:pt>
+                <c:pt idx="2">
+                  <c:v>Consumer Goods</c:v>
+                </c:pt>
+                <c:pt idx="3">
+                  <c:v>Consumer Goods</c:v>
+                </c:pt>
+                <c:pt idx="4">
+                  <c:v>Consumer Goods</c:v>
+                </c:pt>
+                <c:pt idx="5">
                   <c:v>Consumer Goods</c:v>
                 </c:pt>
               </c:strCache>
@@ -674,31 +731,76 @@
           </c:cat>
           <c:val>
             <c:numRef>
-              <c:f>Sheet1!$B$2:$B$2</c:f>
+              <c:f>Sheet1!$B$2:$B$7</c:f>
               <c:numCache>
                 <c:formatCode>General</c:formatCode>
-                <c:ptCount val="1"/>
+                <c:ptCount val="6"/>
                 <c:pt idx="0">
-                  <c:v>6</c:v>
+                  <c:v>27.8</c:v>
+                </c:pt>
+                <c:pt idx="1">
+                  <c:v>17.28</c:v>
+                </c:pt>
+                <c:pt idx="2">
+                  <c:v>15.37</c:v>
+                </c:pt>
+                <c:pt idx="3">
+                  <c:v>14.95</c:v>
+                </c:pt>
+                <c:pt idx="4">
+                  <c:v>12.96</c:v>
+                </c:pt>
+                <c:pt idx="5">
+                  <c:v>11.64</c:v>
                 </c:pt>
               </c:numCache>
             </c:numRef>
           </c:val>
         </c:ser>
-        <c:dLbls>
-          <c:showLegendKey val="0"/>
-          <c:showVal val="1"/>
-          <c:showCatName val="1"/>
-          <c:showSerName val="0"/>
-          <c:showPercent val="1"/>
-          <c:showBubbleSize val="0"/>
-          <c:showLeaderLines val="1"/>
-        </c:dLbls>
-      </c:pieChart>
+        <c:axId val="-2068027336"/>
+        <c:axId val="-2113994440"/>
+      </c:barChart>
+      <c:catAx>
+        <c:axId val="-2068027336"/>
+        <c:scaling>
+          <c:orientation val="minMax"/>
+        </c:scaling>
+        <c:delete val="0"/>
+        <c:axPos val="l"/>
+        <c:majorTickMark val="out"/>
+        <c:minorTickMark val="none"/>
+        <c:tickLblPos val="nextTo"/>
+        <c:crossAx val="-2113994440"/>
+        <c:crosses val="autoZero"/>
+        <c:auto val="1"/>
+        <c:lblAlgn val="ctr"/>
+        <c:lblOffset val="100"/>
+        <c:noMultiLvlLbl val="0"/>
+      </c:catAx>
+      <c:valAx>
+        <c:axId val="-2113994440"/>
+        <c:scaling/>
+        <c:delete val="0"/>
+        <c:axPos val="b"/>
+        <c:majorGridlines/>
+        <c:majorTickMark val="out"/>
+        <c:minorTickMark val="none"/>
+        <c:tickLblPos val="nextTo"/>
+        <c:crossAx val="-2068027336"/>
+        <c:crosses val="autoZero"/>
+      </c:valAx>
     </c:plotArea>
     <c:legend>
       <c:legendPos/>
-      <c:overlay val="0"/>
+      <c:txPr>
+        <a:bodyPr/>
+        <a:lstStyle/>
+        <a:p>
+          <a:pPr>
+            <a:defRPr sz="900"/>
+          </a:pPr>
+        </a:p>
+      </c:txPr>
     </c:legend>
     <c:dispBlanksAs val="gap"/>
   </c:chart>
@@ -4893,44 +4995,6 @@
           </a:graphicData>
         </a:graphic>
       </p:graphicFrame>
-      <p:sp>
-        <p:nvSpPr>
-          <p:cNvPr id="4" name="TextBox 3"/>
-          <p:cNvSpPr txBox="1"/>
-          <p:nvPr/>
-        </p:nvSpPr>
-        <p:spPr>
-          <a:xfrm>
-            <a:off x="731520" y="5303520"/>
-            <a:ext cx="7680960" cy="914400"/>
-          </a:xfrm>
-          <a:prstGeom prst="rect">
-            <a:avLst/>
-          </a:prstGeom>
-          <a:noFill/>
-        </p:spPr>
-        <p:txBody>
-          <a:bodyPr wrap="none">
-            <a:spAutoFit/>
-          </a:bodyPr>
-          <a:lstStyle/>
-          <a:p>
-            <a:pPr algn="ctr">
-              <a:lnSpc>
-                <a:spcPct val="130000"/>
-              </a:lnSpc>
-              <a:defRPr sz="1400" i="1">
-                <a:solidFill>
-                  <a:srgbClr val="343A40"/>
-                </a:solidFill>
-              </a:defRPr>
-            </a:pPr>
-            <a:r>
-              <a:t>💡 Key Insight: "Consumer Goods accounts for 100% of the given category breakdown."</a:t>
-            </a:r>
-          </a:p>
-        </p:txBody>
-      </p:sp>
     </p:spTree>
   </p:cSld>
   <p:clrMapOvr>
@@ -5573,7 +5637,7 @@
               </a:defRPr>
             </a:pPr>
             <a:r>
-              <a:t>💼 AI Insights &amp; Market Predictions</a:t>
+              <a:t>� Key Data Insights</a:t>
             </a:r>
           </a:p>
         </p:txBody>
@@ -5696,7 +5760,7 @@
               </a:defRPr>
             </a:pPr>
             <a:r>
-              <a:t>📈 Top 3 Performers</a:t>
+              <a:t>🏆 Top Performers</a:t>
             </a:r>
           </a:p>
         </p:txBody>
@@ -5733,7 +5797,7 @@
               <a:defRPr sz="1400"/>
             </a:pPr>
             <a:r>
-              <a:t>→ Data analysis in progress</a:t>
+              <a:t>→  Amarilla  showed strong momentum with 16.5% annual return and $0.0B market cap, demonstrating solid investor confidence.</a:t>
             </a:r>
           </a:p>
           <a:p>
@@ -5747,7 +5811,7 @@
               <a:defRPr sz="1400"/>
             </a:pPr>
             <a:r>
-              <a:t>→ Performance metrics being calculated</a:t>
+              <a:t>→  VTT  showed strong momentum with 15.4% annual return and $0.0B market cap, demonstrating solid investor confidence.</a:t>
             </a:r>
           </a:p>
           <a:p>
@@ -5761,7 +5825,7 @@
               <a:defRPr sz="1400"/>
             </a:pPr>
             <a:r>
-              <a:t>→ Trends under evaluation</a:t>
+              <a:t>→  Carretera  showed strong momentum with 14.9% annual return and $0.0B market cap, demonstrating solid investor confidence.</a:t>
             </a:r>
           </a:p>
         </p:txBody>
@@ -5781,7 +5845,7 @@
             <a:avLst/>
           </a:prstGeom>
           <a:solidFill>
-            <a:srgbClr val="E65100"/>
+            <a:srgbClr val="2196F3"/>
           </a:solidFill>
           <a:ln>
             <a:noFill/>
@@ -5879,12 +5943,12 @@
             <a:pPr>
               <a:defRPr sz="2200" b="1">
                 <a:solidFill>
-                  <a:srgbClr val="E65100"/>
+                  <a:srgbClr val="2196F3"/>
                 </a:solidFill>
               </a:defRPr>
             </a:pPr>
             <a:r>
-              <a:t>⚠️ Anomalies Detected</a:t>
+              <a:t>📊 Key Observations</a:t>
             </a:r>
           </a:p>
         </p:txBody>
@@ -5921,7 +5985,7 @@
               <a:defRPr sz="1400"/>
             </a:pPr>
             <a:r>
-              <a:t>→ No significant anomalies detected in current dataset</a:t>
+              <a:t>→ Analysis in progress</a:t>
             </a:r>
           </a:p>
         </p:txBody>
@@ -5941,7 +6005,7 @@
             <a:avLst/>
           </a:prstGeom>
           <a:solidFill>
-            <a:srgbClr val="1976D2"/>
+            <a:srgbClr val="FFC107"/>
           </a:solidFill>
           <a:ln>
             <a:noFill/>
@@ -6039,12 +6103,12 @@
             <a:pPr>
               <a:defRPr sz="2200" b="1">
                 <a:solidFill>
-                  <a:srgbClr val="1976D2"/>
+                  <a:srgbClr val="FFC107"/>
                 </a:solidFill>
               </a:defRPr>
             </a:pPr>
             <a:r>
-              <a:t>💡 Predicted Trends</a:t>
+              <a:t>💡 Data Insights</a:t>
             </a:r>
           </a:p>
         </p:txBody>
@@ -6081,21 +6145,7 @@
               <a:defRPr sz="1400"/>
             </a:pPr>
             <a:r>
-              <a:t>→ Insufficient historical data for accurate predictions</a:t>
-            </a:r>
-          </a:p>
-          <a:p>
-            <a:pPr>
-              <a:lnSpc>
-                <a:spcPct val="120000"/>
-              </a:lnSpc>
-              <a:spcAft>
-                <a:spcPts val="300"/>
-              </a:spcAft>
-              <a:defRPr sz="1400"/>
-            </a:pPr>
-            <a:r>
-              <a:t>→ Continued monitoring recommended</a:t>
+              <a:t>→ More data needed for insights</a:t>
             </a:r>
           </a:p>
         </p:txBody>
